--- a/lectures/le11_glms/le11_glms.pptx
+++ b/lectures/le11_glms/le11_glms.pptx
@@ -5,7 +5,7 @@
     <p:sldMasterId id="2147483648" r:id="rId1"/>
   </p:sldMasterIdLst>
   <p:notesMasterIdLst>
-    <p:notesMasterId r:id="rId43"/>
+    <p:notesMasterId r:id="rId44"/>
   </p:notesMasterIdLst>
   <p:sldIdLst>
     <p:sldId id="256" r:id="rId2"/>
@@ -46,9 +46,10 @@
     <p:sldId id="279" r:id="rId37"/>
     <p:sldId id="282" r:id="rId38"/>
     <p:sldId id="307" r:id="rId39"/>
-    <p:sldId id="308" r:id="rId40"/>
-    <p:sldId id="284" r:id="rId41"/>
-    <p:sldId id="293" r:id="rId42"/>
+    <p:sldId id="311" r:id="rId40"/>
+    <p:sldId id="308" r:id="rId41"/>
+    <p:sldId id="284" r:id="rId42"/>
+    <p:sldId id="293" r:id="rId43"/>
   </p:sldIdLst>
   <p:sldSz cx="12192000" cy="6858000"/>
   <p:notesSz cx="6858000" cy="9144000"/>
@@ -237,7 +238,7 @@
           <a:p>
             <a:fld id="{755658C5-F96F-2B48-913E-225971413D7B}" type="datetimeFigureOut">
               <a:rPr lang="en-US" smtClean="0"/>
-              <a:t>4/6/26</a:t>
+              <a:t>4/7/26</a:t>
             </a:fld>
             <a:endParaRPr lang="en-US"/>
           </a:p>
@@ -717,7 +718,7 @@
           <a:p>
             <a:fld id="{26D9FEE1-29C5-B447-AA78-24FC37BCF137}" type="datetimeFigureOut">
               <a:rPr lang="en-US" smtClean="0"/>
-              <a:t>4/6/26</a:t>
+              <a:t>4/7/26</a:t>
             </a:fld>
             <a:endParaRPr lang="en-US"/>
           </a:p>
@@ -885,7 +886,7 @@
           <a:p>
             <a:fld id="{26D9FEE1-29C5-B447-AA78-24FC37BCF137}" type="datetimeFigureOut">
               <a:rPr lang="en-US" smtClean="0"/>
-              <a:t>4/6/26</a:t>
+              <a:t>4/7/26</a:t>
             </a:fld>
             <a:endParaRPr lang="en-US"/>
           </a:p>
@@ -1063,7 +1064,7 @@
           <a:p>
             <a:fld id="{26D9FEE1-29C5-B447-AA78-24FC37BCF137}" type="datetimeFigureOut">
               <a:rPr lang="en-US" smtClean="0"/>
-              <a:t>4/6/26</a:t>
+              <a:t>4/7/26</a:t>
             </a:fld>
             <a:endParaRPr lang="en-US"/>
           </a:p>
@@ -1231,7 +1232,7 @@
           <a:p>
             <a:fld id="{26D9FEE1-29C5-B447-AA78-24FC37BCF137}" type="datetimeFigureOut">
               <a:rPr lang="en-US" smtClean="0"/>
-              <a:t>4/6/26</a:t>
+              <a:t>4/7/26</a:t>
             </a:fld>
             <a:endParaRPr lang="en-US"/>
           </a:p>
@@ -1476,7 +1477,7 @@
           <a:p>
             <a:fld id="{26D9FEE1-29C5-B447-AA78-24FC37BCF137}" type="datetimeFigureOut">
               <a:rPr lang="en-US" smtClean="0"/>
-              <a:t>4/6/26</a:t>
+              <a:t>4/7/26</a:t>
             </a:fld>
             <a:endParaRPr lang="en-US"/>
           </a:p>
@@ -1705,7 +1706,7 @@
           <a:p>
             <a:fld id="{26D9FEE1-29C5-B447-AA78-24FC37BCF137}" type="datetimeFigureOut">
               <a:rPr lang="en-US" smtClean="0"/>
-              <a:t>4/6/26</a:t>
+              <a:t>4/7/26</a:t>
             </a:fld>
             <a:endParaRPr lang="en-US"/>
           </a:p>
@@ -2069,7 +2070,7 @@
           <a:p>
             <a:fld id="{26D9FEE1-29C5-B447-AA78-24FC37BCF137}" type="datetimeFigureOut">
               <a:rPr lang="en-US" smtClean="0"/>
-              <a:t>4/6/26</a:t>
+              <a:t>4/7/26</a:t>
             </a:fld>
             <a:endParaRPr lang="en-US"/>
           </a:p>
@@ -2186,7 +2187,7 @@
           <a:p>
             <a:fld id="{26D9FEE1-29C5-B447-AA78-24FC37BCF137}" type="datetimeFigureOut">
               <a:rPr lang="en-US" smtClean="0"/>
-              <a:t>4/6/26</a:t>
+              <a:t>4/7/26</a:t>
             </a:fld>
             <a:endParaRPr lang="en-US"/>
           </a:p>
@@ -2281,7 +2282,7 @@
           <a:p>
             <a:fld id="{26D9FEE1-29C5-B447-AA78-24FC37BCF137}" type="datetimeFigureOut">
               <a:rPr lang="en-US" smtClean="0"/>
-              <a:t>4/6/26</a:t>
+              <a:t>4/7/26</a:t>
             </a:fld>
             <a:endParaRPr lang="en-US"/>
           </a:p>
@@ -2556,7 +2557,7 @@
           <a:p>
             <a:fld id="{26D9FEE1-29C5-B447-AA78-24FC37BCF137}" type="datetimeFigureOut">
               <a:rPr lang="en-US" smtClean="0"/>
-              <a:t>4/6/26</a:t>
+              <a:t>4/7/26</a:t>
             </a:fld>
             <a:endParaRPr lang="en-US"/>
           </a:p>
@@ -2808,7 +2809,7 @@
           <a:p>
             <a:fld id="{26D9FEE1-29C5-B447-AA78-24FC37BCF137}" type="datetimeFigureOut">
               <a:rPr lang="en-US" smtClean="0"/>
-              <a:t>4/6/26</a:t>
+              <a:t>4/7/26</a:t>
             </a:fld>
             <a:endParaRPr lang="en-US"/>
           </a:p>
@@ -3019,7 +3020,7 @@
           <a:p>
             <a:fld id="{26D9FEE1-29C5-B447-AA78-24FC37BCF137}" type="datetimeFigureOut">
               <a:rPr lang="en-US" smtClean="0"/>
-              <a:t>4/6/26</a:t>
+              <a:t>4/7/26</a:t>
             </a:fld>
             <a:endParaRPr lang="en-US"/>
           </a:p>
@@ -3441,7 +3442,7 @@
           <a:p>
             <a:r>
               <a:rPr lang="en-US" dirty="0"/>
-              <a:t>Week 10 - GLMs</a:t>
+              <a:t>Week 11 - GLMs</a:t>
             </a:r>
           </a:p>
         </p:txBody>
@@ -7456,7 +7457,7 @@
           <p:cNvPr id="2" name="Title 1">
             <a:extLst>
               <a:ext uri="{FF2B5EF4-FFF2-40B4-BE49-F238E27FC236}">
-                <a16:creationId xmlns:a16="http://schemas.microsoft.com/office/drawing/2014/main" id="{05C3D205-1AAD-F5EC-AEEA-2F8F2CE2FCBB}"/>
+                <a16:creationId xmlns:a16="http://schemas.microsoft.com/office/drawing/2014/main" id="{D72990F6-EE2D-B9CD-21B3-A0D7804C31AD}"/>
               </a:ext>
             </a:extLst>
           </p:cNvPr>
@@ -7474,7 +7475,7 @@
           <a:p>
             <a:r>
               <a:rPr lang="en-US" dirty="0"/>
-              <a:t>Dharma</a:t>
+              <a:t>Stopped here</a:t>
             </a:r>
           </a:p>
         </p:txBody>
@@ -7484,7 +7485,7 @@
           <p:cNvPr id="3" name="Content Placeholder 2">
             <a:extLst>
               <a:ext uri="{FF2B5EF4-FFF2-40B4-BE49-F238E27FC236}">
-                <a16:creationId xmlns:a16="http://schemas.microsoft.com/office/drawing/2014/main" id="{C1ABFA9C-2CD6-710B-1E62-D3877A9D796D}"/>
+                <a16:creationId xmlns:a16="http://schemas.microsoft.com/office/drawing/2014/main" id="{87597A57-8E4A-8B08-50E8-54CB0C6FFCFF}"/>
               </a:ext>
             </a:extLst>
           </p:cNvPr>
@@ -7497,71 +7498,17 @@
         </p:nvSpPr>
         <p:spPr/>
         <p:txBody>
-          <a:bodyPr>
-            <a:normAutofit lnSpcReduction="10000"/>
-          </a:bodyPr>
-          <a:lstStyle/>
-          <a:p>
-            <a:r>
-              <a:rPr lang="en-US" dirty="0">
-                <a:hlinkClick r:id="rId2"/>
-              </a:rPr>
-              <a:t>https://cran.r-project.org/web/packages/DHARMa/vignettes/DHARMa.html</a:t>
-            </a:r>
-            <a:endParaRPr lang="en-US" dirty="0"/>
-          </a:p>
-          <a:p>
-            <a:r>
-              <a:rPr lang="en-US" b="0" i="0" dirty="0">
-                <a:solidFill>
-                  <a:srgbClr val="000000"/>
-                </a:solidFill>
-                <a:effectLst/>
-                <a:latin typeface="Open Sans" panose="020B0606030504020204" pitchFamily="34" charset="0"/>
-              </a:rPr>
-              <a:t>GLMs residuals are harder to interpret because the expected distribution of the data (aka predictive distribution) changes with the fitted values</a:t>
-            </a:r>
-          </a:p>
-          <a:p>
-            <a:r>
-              <a:rPr lang="en-US" b="0" i="0" dirty="0" err="1">
-                <a:solidFill>
-                  <a:srgbClr val="000000"/>
-                </a:solidFill>
-                <a:effectLst/>
-                <a:latin typeface="Open Sans" panose="020B0606030504020204" pitchFamily="34" charset="0"/>
-              </a:rPr>
-              <a:t>DHARMa</a:t>
-            </a:r>
-            <a:r>
-              <a:rPr lang="en-US" b="0" i="0" dirty="0">
-                <a:solidFill>
-                  <a:srgbClr val="000000"/>
-                </a:solidFill>
-                <a:effectLst/>
-                <a:latin typeface="Open Sans" panose="020B0606030504020204" pitchFamily="34" charset="0"/>
-              </a:rPr>
-              <a:t> aims at solving these problems by creating readily interpretable residuals for generalized linear models that are standardized to values between 0 and 1, and that can be interpreted as intuitively as residuals for the linear model. This is achieved by a simulation-based approach.</a:t>
-            </a:r>
-          </a:p>
-          <a:p>
-            <a:r>
-              <a:rPr lang="en-US" dirty="0">
-                <a:solidFill>
-                  <a:srgbClr val="000000"/>
-                </a:solidFill>
-                <a:latin typeface="Open Sans" panose="020B0606030504020204" pitchFamily="34" charset="0"/>
-              </a:rPr>
-              <a:t>Go to code…</a:t>
-            </a:r>
-            <a:endParaRPr lang="en-US" dirty="0"/>
+          <a:bodyPr/>
+          <a:lstStyle/>
+          <a:p>
+            <a:endParaRPr lang="en-US"/>
           </a:p>
         </p:txBody>
       </p:sp>
     </p:spTree>
     <p:extLst>
       <p:ext uri="{BB962C8B-B14F-4D97-AF65-F5344CB8AC3E}">
-        <p14:creationId xmlns:p14="http://schemas.microsoft.com/office/powerpoint/2010/main" val="1217310714"/>
+        <p14:creationId xmlns:p14="http://schemas.microsoft.com/office/powerpoint/2010/main" val="2856194314"/>
       </p:ext>
     </p:extLst>
   </p:cSld>
@@ -7677,6 +7624,143 @@
       </p:grpSpPr>
       <p:sp>
         <p:nvSpPr>
+          <p:cNvPr id="2" name="Title 1">
+            <a:extLst>
+              <a:ext uri="{FF2B5EF4-FFF2-40B4-BE49-F238E27FC236}">
+                <a16:creationId xmlns:a16="http://schemas.microsoft.com/office/drawing/2014/main" id="{05C3D205-1AAD-F5EC-AEEA-2F8F2CE2FCBB}"/>
+              </a:ext>
+            </a:extLst>
+          </p:cNvPr>
+          <p:cNvSpPr>
+            <a:spLocks noGrp="1"/>
+          </p:cNvSpPr>
+          <p:nvPr>
+            <p:ph type="title"/>
+          </p:nvPr>
+        </p:nvSpPr>
+        <p:spPr/>
+        <p:txBody>
+          <a:bodyPr/>
+          <a:lstStyle/>
+          <a:p>
+            <a:r>
+              <a:rPr lang="en-US" dirty="0"/>
+              <a:t>Dharma</a:t>
+            </a:r>
+          </a:p>
+        </p:txBody>
+      </p:sp>
+      <p:sp>
+        <p:nvSpPr>
+          <p:cNvPr id="3" name="Content Placeholder 2">
+            <a:extLst>
+              <a:ext uri="{FF2B5EF4-FFF2-40B4-BE49-F238E27FC236}">
+                <a16:creationId xmlns:a16="http://schemas.microsoft.com/office/drawing/2014/main" id="{C1ABFA9C-2CD6-710B-1E62-D3877A9D796D}"/>
+              </a:ext>
+            </a:extLst>
+          </p:cNvPr>
+          <p:cNvSpPr>
+            <a:spLocks noGrp="1"/>
+          </p:cNvSpPr>
+          <p:nvPr>
+            <p:ph idx="1"/>
+          </p:nvPr>
+        </p:nvSpPr>
+        <p:spPr/>
+        <p:txBody>
+          <a:bodyPr>
+            <a:normAutofit lnSpcReduction="10000"/>
+          </a:bodyPr>
+          <a:lstStyle/>
+          <a:p>
+            <a:r>
+              <a:rPr lang="en-US" dirty="0">
+                <a:hlinkClick r:id="rId2"/>
+              </a:rPr>
+              <a:t>https://cran.r-project.org/web/packages/DHARMa/vignettes/DHARMa.html</a:t>
+            </a:r>
+            <a:endParaRPr lang="en-US" dirty="0"/>
+          </a:p>
+          <a:p>
+            <a:r>
+              <a:rPr lang="en-US" b="0" i="0" dirty="0">
+                <a:solidFill>
+                  <a:srgbClr val="000000"/>
+                </a:solidFill>
+                <a:effectLst/>
+                <a:latin typeface="Open Sans" panose="020B0606030504020204" pitchFamily="34" charset="0"/>
+              </a:rPr>
+              <a:t>GLMs residuals are harder to interpret because the expected distribution of the data (aka predictive distribution) changes with the fitted values</a:t>
+            </a:r>
+          </a:p>
+          <a:p>
+            <a:r>
+              <a:rPr lang="en-US" b="0" i="0" dirty="0" err="1">
+                <a:solidFill>
+                  <a:srgbClr val="000000"/>
+                </a:solidFill>
+                <a:effectLst/>
+                <a:latin typeface="Open Sans" panose="020B0606030504020204" pitchFamily="34" charset="0"/>
+              </a:rPr>
+              <a:t>DHARMa</a:t>
+            </a:r>
+            <a:r>
+              <a:rPr lang="en-US" b="0" i="0" dirty="0">
+                <a:solidFill>
+                  <a:srgbClr val="000000"/>
+                </a:solidFill>
+                <a:effectLst/>
+                <a:latin typeface="Open Sans" panose="020B0606030504020204" pitchFamily="34" charset="0"/>
+              </a:rPr>
+              <a:t> aims at solving these problems by creating readily interpretable residuals for generalized linear models that are standardized to values between 0 and 1, and that can be interpreted as intuitively as residuals for the linear model. This is achieved by a simulation-based approach.</a:t>
+            </a:r>
+          </a:p>
+          <a:p>
+            <a:r>
+              <a:rPr lang="en-US" dirty="0">
+                <a:solidFill>
+                  <a:srgbClr val="000000"/>
+                </a:solidFill>
+                <a:latin typeface="Open Sans" panose="020B0606030504020204" pitchFamily="34" charset="0"/>
+              </a:rPr>
+              <a:t>Go to code…</a:t>
+            </a:r>
+            <a:endParaRPr lang="en-US" dirty="0"/>
+          </a:p>
+        </p:txBody>
+      </p:sp>
+    </p:spTree>
+    <p:extLst>
+      <p:ext uri="{BB962C8B-B14F-4D97-AF65-F5344CB8AC3E}">
+        <p14:creationId xmlns:p14="http://schemas.microsoft.com/office/powerpoint/2010/main" val="1217310714"/>
+      </p:ext>
+    </p:extLst>
+  </p:cSld>
+  <p:clrMapOvr>
+    <a:masterClrMapping/>
+  </p:clrMapOvr>
+</p:sld>
+</file>
+
+<file path=ppt/slides/slide41.xml><?xml version="1.0" encoding="utf-8"?>
+<p:sld xmlns:a="http://schemas.openxmlformats.org/drawingml/2006/main" xmlns:r="http://schemas.openxmlformats.org/officeDocument/2006/relationships" xmlns:p="http://schemas.openxmlformats.org/presentationml/2006/main">
+  <p:cSld>
+    <p:spTree>
+      <p:nvGrpSpPr>
+        <p:cNvPr id="1" name=""/>
+        <p:cNvGrpSpPr/>
+        <p:nvPr/>
+      </p:nvGrpSpPr>
+      <p:grpSpPr>
+        <a:xfrm>
+          <a:off x="0" y="0"/>
+          <a:ext cx="0" cy="0"/>
+          <a:chOff x="0" y="0"/>
+          <a:chExt cx="0" cy="0"/>
+        </a:xfrm>
+      </p:grpSpPr>
+      <p:sp>
+        <p:nvSpPr>
           <p:cNvPr id="2" name="Title 1"/>
           <p:cNvSpPr>
             <a:spLocks noGrp="1"/>
@@ -7978,7 +8062,7 @@
 </p:sld>
 </file>
 
-<file path=ppt/slides/slide41.xml><?xml version="1.0" encoding="utf-8"?>
+<file path=ppt/slides/slide42.xml><?xml version="1.0" encoding="utf-8"?>
 <p:sld xmlns:a="http://schemas.openxmlformats.org/drawingml/2006/main" xmlns:r="http://schemas.openxmlformats.org/officeDocument/2006/relationships" xmlns:p="http://schemas.openxmlformats.org/presentationml/2006/main">
   <p:cSld>
     <p:spTree>
